--- a/dataset/guides_final/SEC/guide/IT-SEC-002_보안 프로그램(백신·EDR) 알림 대응 가이드.pptx
+++ b/dataset/guides_final/SEC/guide/IT-SEC-002_보안 프로그램(백신·EDR) 알림 대응 가이드.pptx
@@ -3240,7 +3240,7 @@
                 <a:ea typeface="Malgun Gothic"/>
                 <a:cs typeface="Malgun Gothic"/>
               </a:rPr>
-              <a:t>한화시스템 ICT 임직원 IT 안내 · 정보보안</a:t>
+              <a:t>가상 ICT 기업 임직원 IT 안내 · 정보보안</a:t>
             </a:r>
           </a:p>
         </p:txBody>
@@ -3472,7 +3472,7 @@
                 <a:ea typeface="Malgun Gothic"/>
                 <a:cs typeface="Malgun Gothic"/>
               </a:rPr>
-              <a:t>© HANWHA SYSTEMS ICT · IT-SEC-002 · 사내 일반</a:t>
+              <a:t>© 가상 ICT 기업 · IT-SEC-002 · 사내 일반</a:t>
             </a:r>
           </a:p>
         </p:txBody>
@@ -5169,7 +5169,7 @@
                 <a:ea typeface="Malgun Gothic"/>
                 <a:cs typeface="Malgun Gothic"/>
               </a:rPr>
-              <a:t>© HANWHA SYSTEMS ICT · IT-SEC-002 · 사내 일반</a:t>
+              <a:t>© 가상 ICT 기업 · IT-SEC-002 · 사내 일반</a:t>
             </a:r>
           </a:p>
         </p:txBody>
@@ -7337,7 +7337,7 @@
                 <a:ea typeface="Malgun Gothic"/>
                 <a:cs typeface="Malgun Gothic"/>
               </a:rPr>
-              <a:t>© HANWHA SYSTEMS ICT · IT-SEC-002 · 사내 일반</a:t>
+              <a:t>© 가상 ICT 기업 · IT-SEC-002 · 사내 일반</a:t>
             </a:r>
           </a:p>
         </p:txBody>
@@ -8864,7 +8864,7 @@
                 <a:ea typeface="Malgun Gothic"/>
                 <a:cs typeface="Malgun Gothic"/>
               </a:rPr>
-              <a:t>© HANWHA SYSTEMS ICT · IT-SEC-002 · 사내 일반</a:t>
+              <a:t>© 가상 ICT 기업 · IT-SEC-002 · 사내 일반</a:t>
             </a:r>
           </a:p>
         </p:txBody>
@@ -10977,7 +10977,7 @@
                 <a:ea typeface="Malgun Gothic"/>
                 <a:cs typeface="Malgun Gothic"/>
               </a:rPr>
-              <a:t>© HANWHA SYSTEMS ICT · IT-SEC-002 · 사내 일반</a:t>
+              <a:t>© 가상 ICT 기업 · IT-SEC-002 · 사내 일반</a:t>
             </a:r>
           </a:p>
         </p:txBody>
@@ -12575,7 +12575,7 @@
                 <a:ea typeface="Malgun Gothic"/>
                 <a:cs typeface="Malgun Gothic"/>
               </a:rPr>
-              <a:t>© HANWHA SYSTEMS ICT · IT-SEC-002 · 사내 일반</a:t>
+              <a:t>© 가상 ICT 기업 · IT-SEC-002 · 사내 일반</a:t>
             </a:r>
           </a:p>
         </p:txBody>
@@ -14568,7 +14568,7 @@
                 <a:ea typeface="Malgun Gothic"/>
                 <a:cs typeface="Malgun Gothic"/>
               </a:rPr>
-              <a:t>© HANWHA SYSTEMS ICT · IT-SEC-002 · 사내 일반</a:t>
+              <a:t>© 가상 ICT 기업 · IT-SEC-002 · 사내 일반</a:t>
             </a:r>
           </a:p>
         </p:txBody>
@@ -16004,7 +16004,7 @@
                 <a:ea typeface="Malgun Gothic"/>
                 <a:cs typeface="Malgun Gothic"/>
               </a:rPr>
-              <a:t>© HANWHA SYSTEMS ICT · IT-SEC-002 · 사내 일반</a:t>
+              <a:t>© 가상 ICT 기업 · IT-SEC-002 · 사내 일반</a:t>
             </a:r>
           </a:p>
         </p:txBody>
@@ -18058,7 +18058,7 @@
                 <a:ea typeface="Malgun Gothic"/>
                 <a:cs typeface="Malgun Gothic"/>
               </a:rPr>
-              <a:t>© HANWHA SYSTEMS ICT · IT-SEC-002 · 사내 일반</a:t>
+              <a:t>© 가상 ICT 기업 · IT-SEC-002 · 사내 일반</a:t>
             </a:r>
           </a:p>
         </p:txBody>
@@ -19702,7 +19702,7 @@
                 <a:ea typeface="Malgun Gothic"/>
                 <a:cs typeface="Malgun Gothic"/>
               </a:rPr>
-              <a:t>© HANWHA SYSTEMS ICT · IT-SEC-002 · 사내 일반</a:t>
+              <a:t>© 가상 ICT 기업 · IT-SEC-002 · 사내 일반</a:t>
             </a:r>
           </a:p>
         </p:txBody>
@@ -19950,7 +19950,7 @@
                 <a:ea typeface="Malgun Gothic"/>
                 <a:cs typeface="Malgun Gothic"/>
               </a:rPr>
-              <a:t>© HANWHA SYSTEMS ICT · IT-SEC-002 · 사내 일반</a:t>
+              <a:t>© 가상 ICT 기업 · IT-SEC-002 · 사내 일반</a:t>
             </a:r>
           </a:p>
         </p:txBody>
@@ -21755,7 +21755,7 @@
                 <a:ea typeface="Malgun Gothic"/>
                 <a:cs typeface="Malgun Gothic"/>
               </a:rPr>
-              <a:t>© HANWHA SYSTEMS ICT · IT-SEC-002 · 사내 일반</a:t>
+              <a:t>© 가상 ICT 기업 · IT-SEC-002 · 사내 일반</a:t>
             </a:r>
           </a:p>
         </p:txBody>
@@ -22648,7 +22648,7 @@
                 <a:ea typeface="Malgun Gothic"/>
                 <a:cs typeface="Malgun Gothic"/>
               </a:rPr>
-              <a:t>© HANWHA SYSTEMS ICT · IT-SEC-002 · 사내 일반</a:t>
+              <a:t>© 가상 ICT 기업 · IT-SEC-002 · 사내 일반</a:t>
             </a:r>
           </a:p>
         </p:txBody>
@@ -22896,7 +22896,7 @@
                 <a:ea typeface="Malgun Gothic"/>
                 <a:cs typeface="Malgun Gothic"/>
               </a:rPr>
-              <a:t>© HANWHA SYSTEMS ICT · IT-SEC-002 · 사내 일반</a:t>
+              <a:t>© 가상 ICT 기업 · IT-SEC-002 · 사내 일반</a:t>
             </a:r>
           </a:p>
         </p:txBody>
@@ -23647,7 +23647,7 @@
                 <a:ea typeface="Malgun Gothic"/>
                 <a:cs typeface="Malgun Gothic"/>
               </a:rPr>
-              <a:t>© HANWHA SYSTEMS ICT · IT-SEC-002 · 사내 일반</a:t>
+              <a:t>© 가상 ICT 기업 · IT-SEC-002 · 사내 일반</a:t>
             </a:r>
           </a:p>
         </p:txBody>
@@ -23895,7 +23895,7 @@
                 <a:ea typeface="Malgun Gothic"/>
                 <a:cs typeface="Malgun Gothic"/>
               </a:rPr>
-              <a:t>© HANWHA SYSTEMS ICT · IT-SEC-002 · 사내 일반</a:t>
+              <a:t>© 가상 ICT 기업 · IT-SEC-002 · 사내 일반</a:t>
             </a:r>
           </a:p>
         </p:txBody>
@@ -24407,7 +24407,7 @@
                           <a:ea typeface="Malgun Gothic"/>
                           <a:cs typeface="Malgun Gothic"/>
                         </a:rPr>
-                        <a:t>사내 IT 포털(hanwha-admin) 상단 [챗봇 문의]</a:t>
+                        <a:t>사내 IT 포털 상단 [챗봇 문의]</a:t>
                       </a:r>
                     </a:p>
                   </a:txBody>
@@ -25099,7 +25099,7 @@
                           <a:ea typeface="Malgun Gothic"/>
                           <a:cs typeface="Malgun Gothic"/>
                         </a:rPr>
-                        <a:t>it-helpdesk@hanwha-ict.example</a:t>
+                        <a:t>it-helpdesk@ict.example</a:t>
                       </a:r>
                     </a:p>
                   </a:txBody>
@@ -25398,7 +25398,7 @@
                 <a:ea typeface="Malgun Gothic"/>
                 <a:cs typeface="Malgun Gothic"/>
               </a:rPr>
-              <a:t>© HANWHA SYSTEMS ICT · IT-SEC-002 · 사내 일반</a:t>
+              <a:t>© 가상 ICT 기업 · IT-SEC-002 · 사내 일반</a:t>
             </a:r>
           </a:p>
         </p:txBody>
@@ -25646,7 +25646,7 @@
                 <a:ea typeface="Malgun Gothic"/>
                 <a:cs typeface="Malgun Gothic"/>
               </a:rPr>
-              <a:t>© HANWHA SYSTEMS ICT · IT-SEC-002 · 사내 일반</a:t>
+              <a:t>© 가상 ICT 기업 · IT-SEC-002 · 사내 일반</a:t>
             </a:r>
           </a:p>
         </p:txBody>
@@ -27862,7 +27862,7 @@
                 <a:ea typeface="Malgun Gothic"/>
                 <a:cs typeface="Malgun Gothic"/>
               </a:rPr>
-              <a:t>© HANWHA SYSTEMS ICT · IT-SEC-002 · 사내 일반</a:t>
+              <a:t>© 가상 ICT 기업 · IT-SEC-002 · 사내 일반</a:t>
             </a:r>
           </a:p>
         </p:txBody>
@@ -28839,7 +28839,7 @@
                 <a:ea typeface="Malgun Gothic"/>
                 <a:cs typeface="Malgun Gothic"/>
               </a:rPr>
-              <a:t>© HANWHA SYSTEMS ICT · IT-SEC-002 · 사내 일반</a:t>
+              <a:t>© 가상 ICT 기업 · IT-SEC-002 · 사내 일반</a:t>
             </a:r>
           </a:p>
         </p:txBody>
@@ -30115,7 +30115,7 @@
                 <a:ea typeface="Malgun Gothic"/>
                 <a:cs typeface="Malgun Gothic"/>
               </a:rPr>
-              <a:t>© HANWHA SYSTEMS ICT · IT-SEC-002 · 사내 일반</a:t>
+              <a:t>© 가상 ICT 기업 · IT-SEC-002 · 사내 일반</a:t>
             </a:r>
           </a:p>
         </p:txBody>
@@ -30363,7 +30363,7 @@
                 <a:ea typeface="Malgun Gothic"/>
                 <a:cs typeface="Malgun Gothic"/>
               </a:rPr>
-              <a:t>© HANWHA SYSTEMS ICT · IT-SEC-002 · 사내 일반</a:t>
+              <a:t>© 가상 ICT 기업 · IT-SEC-002 · 사내 일반</a:t>
             </a:r>
           </a:p>
         </p:txBody>
@@ -32035,7 +32035,7 @@
                 <a:ea typeface="Malgun Gothic"/>
                 <a:cs typeface="Malgun Gothic"/>
               </a:rPr>
-              <a:t>© HANWHA SYSTEMS ICT · IT-SEC-002 · 사내 일반</a:t>
+              <a:t>© 가상 ICT 기업 · IT-SEC-002 · 사내 일반</a:t>
             </a:r>
           </a:p>
         </p:txBody>
@@ -32283,7 +32283,7 @@
                 <a:ea typeface="Malgun Gothic"/>
                 <a:cs typeface="Malgun Gothic"/>
               </a:rPr>
-              <a:t>© HANWHA SYSTEMS ICT · IT-SEC-002 · 사내 일반</a:t>
+              <a:t>© 가상 ICT 기업 · IT-SEC-002 · 사내 일반</a:t>
             </a:r>
           </a:p>
         </p:txBody>
@@ -34043,7 +34043,7 @@
                 <a:ea typeface="Malgun Gothic"/>
                 <a:cs typeface="Malgun Gothic"/>
               </a:rPr>
-              <a:t>© HANWHA SYSTEMS ICT · IT-SEC-002 · 사내 일반</a:t>
+              <a:t>© 가상 ICT 기업 · IT-SEC-002 · 사내 일반</a:t>
             </a:r>
           </a:p>
         </p:txBody>
@@ -35569,7 +35569,7 @@
                 <a:ea typeface="Malgun Gothic"/>
                 <a:cs typeface="Malgun Gothic"/>
               </a:rPr>
-              <a:t>© HANWHA SYSTEMS ICT · IT-SEC-002 · 사내 일반</a:t>
+              <a:t>© 가상 ICT 기업 · IT-SEC-002 · 사내 일반</a:t>
             </a:r>
           </a:p>
         </p:txBody>
@@ -35817,7 +35817,7 @@
                 <a:ea typeface="Malgun Gothic"/>
                 <a:cs typeface="Malgun Gothic"/>
               </a:rPr>
-              <a:t>© HANWHA SYSTEMS ICT · IT-SEC-002 · 사내 일반</a:t>
+              <a:t>© 가상 ICT 기업 · IT-SEC-002 · 사내 일반</a:t>
             </a:r>
           </a:p>
         </p:txBody>
